--- a/week06/Lecture06.pptx
+++ b/week06/Lecture06.pptx
@@ -539,7 +539,7 @@
           <a:p>
             <a:fld id="{634F3F22-B4BB-3F48-9180-464A9F2D66D1}" type="datetimeFigureOut">
               <a:rPr kumimoji="1" lang="zh-CN" altLang="en-US" smtClean="0"/>
-              <a:t>2025/3/25</a:t>
+              <a:t>2026/4/6</a:t>
             </a:fld>
             <a:endParaRPr kumimoji="1" lang="zh-CN" altLang="en-US"/>
           </a:p>
@@ -1019,7 +1019,7 @@
           <a:p>
             <a:fld id="{FC19A4FA-3D9A-4114-B0D5-759CBD56F1AB}" type="datetimeFigureOut">
               <a:rPr lang="zh-CN" altLang="en-US" smtClean="0"/>
-              <a:t>2025/3/25</a:t>
+              <a:t>2026/4/6</a:t>
             </a:fld>
             <a:endParaRPr lang="zh-CN" altLang="en-US"/>
           </a:p>
@@ -1222,7 +1222,7 @@
           <a:p>
             <a:fld id="{FC19A4FA-3D9A-4114-B0D5-759CBD56F1AB}" type="datetimeFigureOut">
               <a:rPr lang="zh-CN" altLang="en-US" smtClean="0"/>
-              <a:t>2025/3/25</a:t>
+              <a:t>2026/4/6</a:t>
             </a:fld>
             <a:endParaRPr lang="zh-CN" altLang="en-US"/>
           </a:p>
@@ -1400,7 +1400,7 @@
           <a:p>
             <a:fld id="{FC19A4FA-3D9A-4114-B0D5-759CBD56F1AB}" type="datetimeFigureOut">
               <a:rPr lang="zh-CN" altLang="en-US" smtClean="0"/>
-              <a:t>2025/3/25</a:t>
+              <a:t>2026/4/6</a:t>
             </a:fld>
             <a:endParaRPr lang="zh-CN" altLang="en-US"/>
           </a:p>
@@ -1624,7 +1624,7 @@
           <a:p>
             <a:fld id="{FC19A4FA-3D9A-4114-B0D5-759CBD56F1AB}" type="datetimeFigureOut">
               <a:rPr lang="zh-CN" altLang="en-US" smtClean="0"/>
-              <a:t>2025/3/25</a:t>
+              <a:t>2026/4/6</a:t>
             </a:fld>
             <a:endParaRPr lang="zh-CN" altLang="en-US"/>
           </a:p>
@@ -1858,7 +1858,7 @@
           <a:p>
             <a:fld id="{FC19A4FA-3D9A-4114-B0D5-759CBD56F1AB}" type="datetimeFigureOut">
               <a:rPr lang="zh-CN" altLang="en-US" smtClean="0"/>
-              <a:t>2025/3/25</a:t>
+              <a:t>2026/4/6</a:t>
             </a:fld>
             <a:endParaRPr lang="zh-CN" altLang="en-US"/>
           </a:p>
@@ -2257,7 +2257,7 @@
           <a:p>
             <a:fld id="{FC19A4FA-3D9A-4114-B0D5-759CBD56F1AB}" type="datetimeFigureOut">
               <a:rPr lang="zh-CN" altLang="en-US" smtClean="0"/>
-              <a:t>2025/3/25</a:t>
+              <a:t>2026/4/6</a:t>
             </a:fld>
             <a:endParaRPr lang="zh-CN" altLang="en-US"/>
           </a:p>
@@ -2537,7 +2537,7 @@
           <a:p>
             <a:fld id="{FC19A4FA-3D9A-4114-B0D5-759CBD56F1AB}" type="datetimeFigureOut">
               <a:rPr lang="zh-CN" altLang="en-US" smtClean="0"/>
-              <a:t>2025/3/25</a:t>
+              <a:t>2026/4/6</a:t>
             </a:fld>
             <a:endParaRPr lang="zh-CN" altLang="en-US"/>
           </a:p>
@@ -2689,7 +2689,7 @@
           <a:p>
             <a:fld id="{FC19A4FA-3D9A-4114-B0D5-759CBD56F1AB}" type="datetimeFigureOut">
               <a:rPr lang="zh-CN" altLang="en-US" smtClean="0"/>
-              <a:t>2025/3/25</a:t>
+              <a:t>2026/4/6</a:t>
             </a:fld>
             <a:endParaRPr lang="zh-CN" altLang="en-US"/>
           </a:p>
@@ -2819,7 +2819,7 @@
           <a:p>
             <a:fld id="{FC19A4FA-3D9A-4114-B0D5-759CBD56F1AB}" type="datetimeFigureOut">
               <a:rPr lang="zh-CN" altLang="en-US" smtClean="0"/>
-              <a:t>2025/3/25</a:t>
+              <a:t>2026/4/6</a:t>
             </a:fld>
             <a:endParaRPr lang="zh-CN" altLang="en-US"/>
           </a:p>
@@ -3129,7 +3129,7 @@
           <a:p>
             <a:fld id="{FC19A4FA-3D9A-4114-B0D5-759CBD56F1AB}" type="datetimeFigureOut">
               <a:rPr lang="zh-CN" altLang="en-US" smtClean="0"/>
-              <a:t>2025/3/25</a:t>
+              <a:t>2026/4/6</a:t>
             </a:fld>
             <a:endParaRPr lang="zh-CN" altLang="en-US"/>
           </a:p>
@@ -3416,7 +3416,7 @@
           <a:p>
             <a:fld id="{FC19A4FA-3D9A-4114-B0D5-759CBD56F1AB}" type="datetimeFigureOut">
               <a:rPr lang="zh-CN" altLang="en-US" smtClean="0"/>
-              <a:t>2025/3/25</a:t>
+              <a:t>2026/4/6</a:t>
             </a:fld>
             <a:endParaRPr lang="zh-CN" altLang="en-US"/>
           </a:p>
@@ -3709,7 +3709,7 @@
           <a:p>
             <a:fld id="{FC19A4FA-3D9A-4114-B0D5-759CBD56F1AB}" type="datetimeFigureOut">
               <a:rPr lang="zh-CN" altLang="en-US" smtClean="0"/>
-              <a:t>2025/3/25</a:t>
+              <a:t>2026/4/6</a:t>
             </a:fld>
             <a:endParaRPr lang="zh-CN" altLang="en-US"/>
           </a:p>
@@ -32476,43 +32476,43 @@
           <a:custGeom>
             <a:avLst/>
             <a:gdLst>
-              <a:gd name="connsiteX0" fmla="*/ 4937 w 4548891"/>
-              <a:gd name="connsiteY0" fmla="*/ 1178542 h 2211453"/>
-              <a:gd name="connsiteX1" fmla="*/ 1879180 w 4548891"/>
-              <a:gd name="connsiteY1" fmla="*/ 16825 h 2211453"/>
-              <a:gd name="connsiteX2" fmla="*/ 3474091 w 4548891"/>
-              <a:gd name="connsiteY2" fmla="*/ 166313 h 2211453"/>
-              <a:gd name="connsiteX3" fmla="*/ 3050216 w 4548891"/>
-              <a:gd name="connsiteY3" fmla="*/ 498239 h 2211453"/>
-              <a:gd name="connsiteX4" fmla="*/ 2650335 w 4548891"/>
-              <a:gd name="connsiteY4" fmla="*/ 811377 h 2211453"/>
-              <a:gd name="connsiteX5" fmla="*/ 2274446 w 4548891"/>
-              <a:gd name="connsiteY5" fmla="*/ 1105727 h 2211453"/>
-              <a:gd name="connsiteX6" fmla="*/ 1752459 w 4548891"/>
-              <a:gd name="connsiteY6" fmla="*/ 1122474 h 2211453"/>
-              <a:gd name="connsiteX7" fmla="*/ 1230472 w 4548891"/>
-              <a:gd name="connsiteY7" fmla="*/ 1139222 h 2211453"/>
-              <a:gd name="connsiteX8" fmla="*/ 617704 w 4548891"/>
-              <a:gd name="connsiteY8" fmla="*/ 1158882 h 2211453"/>
-              <a:gd name="connsiteX9" fmla="*/ 4937 w 4548891"/>
-              <a:gd name="connsiteY9" fmla="*/ 1178542 h 2211453"/>
-              <a:gd name="connsiteX0" fmla="*/ 4937 w 4548891"/>
-              <a:gd name="connsiteY0" fmla="*/ 1178542 h 2211453"/>
-              <a:gd name="connsiteX1" fmla="*/ 1879180 w 4548891"/>
-              <a:gd name="connsiteY1" fmla="*/ 16825 h 2211453"/>
-              <a:gd name="connsiteX2" fmla="*/ 3474091 w 4548891"/>
-              <a:gd name="connsiteY2" fmla="*/ 166313 h 2211453"/>
+              <a:gd name="csX0" fmla="*/ 4937 w 4548891"/>
+              <a:gd name="csY0" fmla="*/ 1178542 h 2211453"/>
+              <a:gd name="csX1" fmla="*/ 1879180 w 4548891"/>
+              <a:gd name="csY1" fmla="*/ 16825 h 2211453"/>
+              <a:gd name="csX2" fmla="*/ 3474091 w 4548891"/>
+              <a:gd name="csY2" fmla="*/ 166313 h 2211453"/>
+              <a:gd name="csX3" fmla="*/ 3050216 w 4548891"/>
+              <a:gd name="csY3" fmla="*/ 498239 h 2211453"/>
+              <a:gd name="csX4" fmla="*/ 2650335 w 4548891"/>
+              <a:gd name="csY4" fmla="*/ 811377 h 2211453"/>
+              <a:gd name="csX5" fmla="*/ 2274446 w 4548891"/>
+              <a:gd name="csY5" fmla="*/ 1105727 h 2211453"/>
+              <a:gd name="csX6" fmla="*/ 1752459 w 4548891"/>
+              <a:gd name="csY6" fmla="*/ 1122474 h 2211453"/>
+              <a:gd name="csX7" fmla="*/ 1230472 w 4548891"/>
+              <a:gd name="csY7" fmla="*/ 1139222 h 2211453"/>
+              <a:gd name="csX8" fmla="*/ 617704 w 4548891"/>
+              <a:gd name="csY8" fmla="*/ 1158882 h 2211453"/>
+              <a:gd name="csX9" fmla="*/ 4937 w 4548891"/>
+              <a:gd name="csY9" fmla="*/ 1178542 h 2211453"/>
+              <a:gd name="csX0" fmla="*/ 4937 w 4548891"/>
+              <a:gd name="csY0" fmla="*/ 1178542 h 2211453"/>
+              <a:gd name="csX1" fmla="*/ 1879180 w 4548891"/>
+              <a:gd name="csY1" fmla="*/ 16825 h 2211453"/>
+              <a:gd name="csX2" fmla="*/ 3474091 w 4548891"/>
+              <a:gd name="csY2" fmla="*/ 166313 h 2211453"/>
             </a:gdLst>
             <a:ahLst/>
             <a:cxnLst>
               <a:cxn ang="0">
-                <a:pos x="connsiteX0" y="connsiteY0"/>
+                <a:pos x="csX0" y="csY0"/>
               </a:cxn>
               <a:cxn ang="0">
-                <a:pos x="connsiteX1" y="connsiteY1"/>
+                <a:pos x="csX1" y="csY1"/>
               </a:cxn>
               <a:cxn ang="0">
-                <a:pos x="connsiteX2" y="connsiteY2"/>
+                <a:pos x="csX2" y="csY2"/>
               </a:cxn>
             </a:cxnLst>
             <a:rect l="l" t="t" r="r" b="b"/>
@@ -32665,43 +32665,43 @@
           <a:custGeom>
             <a:avLst/>
             <a:gdLst>
-              <a:gd name="connsiteX0" fmla="*/ 4361376 w 4548891"/>
-              <a:gd name="connsiteY0" fmla="*/ 1545372 h 2211453"/>
-              <a:gd name="connsiteX1" fmla="*/ 2510450 w 4548891"/>
-              <a:gd name="connsiteY1" fmla="*/ 2205485 h 2211453"/>
-              <a:gd name="connsiteX2" fmla="*/ 1013428 w 4548891"/>
-              <a:gd name="connsiteY2" fmla="*/ 2025947 h 2211453"/>
-              <a:gd name="connsiteX3" fmla="*/ 1458988 w 4548891"/>
-              <a:gd name="connsiteY3" fmla="*/ 1700803 h 2211453"/>
-              <a:gd name="connsiteX4" fmla="*/ 1879327 w 4548891"/>
-              <a:gd name="connsiteY4" fmla="*/ 1394063 h 2211453"/>
-              <a:gd name="connsiteX5" fmla="*/ 2274446 w 4548891"/>
-              <a:gd name="connsiteY5" fmla="*/ 1105727 h 2211453"/>
-              <a:gd name="connsiteX6" fmla="*/ 2754440 w 4548891"/>
-              <a:gd name="connsiteY6" fmla="*/ 1206845 h 2211453"/>
-              <a:gd name="connsiteX7" fmla="*/ 3234434 w 4548891"/>
-              <a:gd name="connsiteY7" fmla="*/ 1307964 h 2211453"/>
-              <a:gd name="connsiteX8" fmla="*/ 3797905 w 4548891"/>
-              <a:gd name="connsiteY8" fmla="*/ 1426668 h 2211453"/>
-              <a:gd name="connsiteX9" fmla="*/ 4361376 w 4548891"/>
-              <a:gd name="connsiteY9" fmla="*/ 1545372 h 2211453"/>
-              <a:gd name="connsiteX0" fmla="*/ 4361376 w 4548891"/>
-              <a:gd name="connsiteY0" fmla="*/ 1545372 h 2211453"/>
-              <a:gd name="connsiteX1" fmla="*/ 2510450 w 4548891"/>
-              <a:gd name="connsiteY1" fmla="*/ 2205485 h 2211453"/>
-              <a:gd name="connsiteX2" fmla="*/ 1013428 w 4548891"/>
-              <a:gd name="connsiteY2" fmla="*/ 2025947 h 2211453"/>
+              <a:gd name="csX0" fmla="*/ 4361376 w 4548891"/>
+              <a:gd name="csY0" fmla="*/ 1545372 h 2211453"/>
+              <a:gd name="csX1" fmla="*/ 2510450 w 4548891"/>
+              <a:gd name="csY1" fmla="*/ 2205485 h 2211453"/>
+              <a:gd name="csX2" fmla="*/ 1013428 w 4548891"/>
+              <a:gd name="csY2" fmla="*/ 2025947 h 2211453"/>
+              <a:gd name="csX3" fmla="*/ 1458988 w 4548891"/>
+              <a:gd name="csY3" fmla="*/ 1700803 h 2211453"/>
+              <a:gd name="csX4" fmla="*/ 1879327 w 4548891"/>
+              <a:gd name="csY4" fmla="*/ 1394063 h 2211453"/>
+              <a:gd name="csX5" fmla="*/ 2274446 w 4548891"/>
+              <a:gd name="csY5" fmla="*/ 1105727 h 2211453"/>
+              <a:gd name="csX6" fmla="*/ 2754440 w 4548891"/>
+              <a:gd name="csY6" fmla="*/ 1206845 h 2211453"/>
+              <a:gd name="csX7" fmla="*/ 3234434 w 4548891"/>
+              <a:gd name="csY7" fmla="*/ 1307964 h 2211453"/>
+              <a:gd name="csX8" fmla="*/ 3797905 w 4548891"/>
+              <a:gd name="csY8" fmla="*/ 1426668 h 2211453"/>
+              <a:gd name="csX9" fmla="*/ 4361376 w 4548891"/>
+              <a:gd name="csY9" fmla="*/ 1545372 h 2211453"/>
+              <a:gd name="csX0" fmla="*/ 4361376 w 4548891"/>
+              <a:gd name="csY0" fmla="*/ 1545372 h 2211453"/>
+              <a:gd name="csX1" fmla="*/ 2510450 w 4548891"/>
+              <a:gd name="csY1" fmla="*/ 2205485 h 2211453"/>
+              <a:gd name="csX2" fmla="*/ 1013428 w 4548891"/>
+              <a:gd name="csY2" fmla="*/ 2025947 h 2211453"/>
             </a:gdLst>
             <a:ahLst/>
             <a:cxnLst>
               <a:cxn ang="0">
-                <a:pos x="connsiteX0" y="connsiteY0"/>
+                <a:pos x="csX0" y="csY0"/>
               </a:cxn>
               <a:cxn ang="0">
-                <a:pos x="connsiteX1" y="connsiteY1"/>
+                <a:pos x="csX1" y="csY1"/>
               </a:cxn>
               <a:cxn ang="0">
-                <a:pos x="connsiteX2" y="connsiteY2"/>
+                <a:pos x="csX2" y="csY2"/>
               </a:cxn>
             </a:cxnLst>
             <a:rect l="l" t="t" r="r" b="b"/>
@@ -32854,43 +32854,43 @@
           <a:custGeom>
             <a:avLst/>
             <a:gdLst>
-              <a:gd name="connsiteX0" fmla="*/ 2646 w 4699223"/>
-              <a:gd name="connsiteY0" fmla="*/ 1662379 h 3174158"/>
-              <a:gd name="connsiteX1" fmla="*/ 1609205 w 4699223"/>
-              <a:gd name="connsiteY1" fmla="*/ 80858 h 3174158"/>
-              <a:gd name="connsiteX2" fmla="*/ 3492134 w 4699223"/>
-              <a:gd name="connsiteY2" fmla="*/ 200267 h 3174158"/>
-              <a:gd name="connsiteX3" fmla="*/ 3088443 w 4699223"/>
-              <a:gd name="connsiteY3" fmla="*/ 690274 h 3174158"/>
-              <a:gd name="connsiteX4" fmla="*/ 2707602 w 4699223"/>
-              <a:gd name="connsiteY4" fmla="*/ 1152545 h 3174158"/>
-              <a:gd name="connsiteX5" fmla="*/ 2349612 w 4699223"/>
-              <a:gd name="connsiteY5" fmla="*/ 1587079 h 3174158"/>
-              <a:gd name="connsiteX6" fmla="*/ 1809810 w 4699223"/>
-              <a:gd name="connsiteY6" fmla="*/ 1604398 h 3174158"/>
-              <a:gd name="connsiteX7" fmla="*/ 1270008 w 4699223"/>
-              <a:gd name="connsiteY7" fmla="*/ 1621717 h 3174158"/>
-              <a:gd name="connsiteX8" fmla="*/ 636327 w 4699223"/>
-              <a:gd name="connsiteY8" fmla="*/ 1642048 h 3174158"/>
-              <a:gd name="connsiteX9" fmla="*/ 2646 w 4699223"/>
-              <a:gd name="connsiteY9" fmla="*/ 1662379 h 3174158"/>
-              <a:gd name="connsiteX0" fmla="*/ 2646 w 4699223"/>
-              <a:gd name="connsiteY0" fmla="*/ 1662379 h 3174158"/>
-              <a:gd name="connsiteX1" fmla="*/ 1609205 w 4699223"/>
-              <a:gd name="connsiteY1" fmla="*/ 80858 h 3174158"/>
-              <a:gd name="connsiteX2" fmla="*/ 3492134 w 4699223"/>
-              <a:gd name="connsiteY2" fmla="*/ 200267 h 3174158"/>
+              <a:gd name="csX0" fmla="*/ 2646 w 4699223"/>
+              <a:gd name="csY0" fmla="*/ 1662379 h 3174158"/>
+              <a:gd name="csX1" fmla="*/ 1609205 w 4699223"/>
+              <a:gd name="csY1" fmla="*/ 80858 h 3174158"/>
+              <a:gd name="csX2" fmla="*/ 3492134 w 4699223"/>
+              <a:gd name="csY2" fmla="*/ 200267 h 3174158"/>
+              <a:gd name="csX3" fmla="*/ 3088443 w 4699223"/>
+              <a:gd name="csY3" fmla="*/ 690274 h 3174158"/>
+              <a:gd name="csX4" fmla="*/ 2707602 w 4699223"/>
+              <a:gd name="csY4" fmla="*/ 1152545 h 3174158"/>
+              <a:gd name="csX5" fmla="*/ 2349612 w 4699223"/>
+              <a:gd name="csY5" fmla="*/ 1587079 h 3174158"/>
+              <a:gd name="csX6" fmla="*/ 1809810 w 4699223"/>
+              <a:gd name="csY6" fmla="*/ 1604398 h 3174158"/>
+              <a:gd name="csX7" fmla="*/ 1270008 w 4699223"/>
+              <a:gd name="csY7" fmla="*/ 1621717 h 3174158"/>
+              <a:gd name="csX8" fmla="*/ 636327 w 4699223"/>
+              <a:gd name="csY8" fmla="*/ 1642048 h 3174158"/>
+              <a:gd name="csX9" fmla="*/ 2646 w 4699223"/>
+              <a:gd name="csY9" fmla="*/ 1662379 h 3174158"/>
+              <a:gd name="csX0" fmla="*/ 2646 w 4699223"/>
+              <a:gd name="csY0" fmla="*/ 1662379 h 3174158"/>
+              <a:gd name="csX1" fmla="*/ 1609205 w 4699223"/>
+              <a:gd name="csY1" fmla="*/ 80858 h 3174158"/>
+              <a:gd name="csX2" fmla="*/ 3492134 w 4699223"/>
+              <a:gd name="csY2" fmla="*/ 200267 h 3174158"/>
             </a:gdLst>
             <a:ahLst/>
             <a:cxnLst>
               <a:cxn ang="0">
-                <a:pos x="connsiteX0" y="connsiteY0"/>
+                <a:pos x="csX0" y="csY0"/>
               </a:cxn>
               <a:cxn ang="0">
-                <a:pos x="connsiteX1" y="connsiteY1"/>
+                <a:pos x="csX1" y="csY1"/>
               </a:cxn>
               <a:cxn ang="0">
-                <a:pos x="connsiteX2" y="connsiteY2"/>
+                <a:pos x="csX2" y="csY2"/>
               </a:cxn>
             </a:cxnLst>
             <a:rect l="l" t="t" r="r" b="b"/>
@@ -33043,45 +33043,45 @@
           <a:custGeom>
             <a:avLst/>
             <a:gdLst>
-              <a:gd name="connsiteX0" fmla="*/ 5603086 w 5606010"/>
-              <a:gd name="connsiteY0" fmla="*/ 1327891 h 2782871"/>
-              <a:gd name="connsiteX1" fmla="*/ 3267728 w 5606010"/>
-              <a:gd name="connsiteY1" fmla="*/ 2763614 h 2782871"/>
-              <a:gd name="connsiteX2" fmla="*/ 1226450 w 5606010"/>
-              <a:gd name="connsiteY2" fmla="*/ 2541916 h 2782871"/>
-              <a:gd name="connsiteX3" fmla="*/ 1783499 w 5606010"/>
-              <a:gd name="connsiteY3" fmla="*/ 2135413 h 2782871"/>
-              <a:gd name="connsiteX4" fmla="*/ 2309018 w 5606010"/>
-              <a:gd name="connsiteY4" fmla="*/ 1751920 h 2782871"/>
-              <a:gd name="connsiteX5" fmla="*/ 2803005 w 5606010"/>
-              <a:gd name="connsiteY5" fmla="*/ 1391436 h 2782871"/>
-              <a:gd name="connsiteX6" fmla="*/ 3307020 w 5606010"/>
-              <a:gd name="connsiteY6" fmla="*/ 1379998 h 2782871"/>
-              <a:gd name="connsiteX7" fmla="*/ 3811034 w 5606010"/>
-              <a:gd name="connsiteY7" fmla="*/ 1368560 h 2782871"/>
-              <a:gd name="connsiteX8" fmla="*/ 4427052 w 5606010"/>
-              <a:gd name="connsiteY8" fmla="*/ 1354580 h 2782871"/>
-              <a:gd name="connsiteX9" fmla="*/ 4903066 w 5606010"/>
-              <a:gd name="connsiteY9" fmla="*/ 1343777 h 2782871"/>
-              <a:gd name="connsiteX10" fmla="*/ 5603086 w 5606010"/>
-              <a:gd name="connsiteY10" fmla="*/ 1327891 h 2782871"/>
-              <a:gd name="connsiteX0" fmla="*/ 5603086 w 5606010"/>
-              <a:gd name="connsiteY0" fmla="*/ 1327891 h 2782871"/>
-              <a:gd name="connsiteX1" fmla="*/ 3267728 w 5606010"/>
-              <a:gd name="connsiteY1" fmla="*/ 2763614 h 2782871"/>
-              <a:gd name="connsiteX2" fmla="*/ 1226450 w 5606010"/>
-              <a:gd name="connsiteY2" fmla="*/ 2541916 h 2782871"/>
+              <a:gd name="csX0" fmla="*/ 5603086 w 5606010"/>
+              <a:gd name="csY0" fmla="*/ 1327891 h 2782871"/>
+              <a:gd name="csX1" fmla="*/ 3267728 w 5606010"/>
+              <a:gd name="csY1" fmla="*/ 2763614 h 2782871"/>
+              <a:gd name="csX2" fmla="*/ 1226450 w 5606010"/>
+              <a:gd name="csY2" fmla="*/ 2541916 h 2782871"/>
+              <a:gd name="csX3" fmla="*/ 1783499 w 5606010"/>
+              <a:gd name="csY3" fmla="*/ 2135413 h 2782871"/>
+              <a:gd name="csX4" fmla="*/ 2309018 w 5606010"/>
+              <a:gd name="csY4" fmla="*/ 1751920 h 2782871"/>
+              <a:gd name="csX5" fmla="*/ 2803005 w 5606010"/>
+              <a:gd name="csY5" fmla="*/ 1391436 h 2782871"/>
+              <a:gd name="csX6" fmla="*/ 3307020 w 5606010"/>
+              <a:gd name="csY6" fmla="*/ 1379998 h 2782871"/>
+              <a:gd name="csX7" fmla="*/ 3811034 w 5606010"/>
+              <a:gd name="csY7" fmla="*/ 1368560 h 2782871"/>
+              <a:gd name="csX8" fmla="*/ 4427052 w 5606010"/>
+              <a:gd name="csY8" fmla="*/ 1354580 h 2782871"/>
+              <a:gd name="csX9" fmla="*/ 4903066 w 5606010"/>
+              <a:gd name="csY9" fmla="*/ 1343777 h 2782871"/>
+              <a:gd name="csX10" fmla="*/ 5603086 w 5606010"/>
+              <a:gd name="csY10" fmla="*/ 1327891 h 2782871"/>
+              <a:gd name="csX0" fmla="*/ 5603086 w 5606010"/>
+              <a:gd name="csY0" fmla="*/ 1327891 h 2782871"/>
+              <a:gd name="csX1" fmla="*/ 3267728 w 5606010"/>
+              <a:gd name="csY1" fmla="*/ 2763614 h 2782871"/>
+              <a:gd name="csX2" fmla="*/ 1226450 w 5606010"/>
+              <a:gd name="csY2" fmla="*/ 2541916 h 2782871"/>
             </a:gdLst>
             <a:ahLst/>
             <a:cxnLst>
               <a:cxn ang="0">
-                <a:pos x="connsiteX0" y="connsiteY0"/>
+                <a:pos x="csX0" y="csY0"/>
               </a:cxn>
               <a:cxn ang="0">
-                <a:pos x="connsiteX1" y="connsiteY1"/>
+                <a:pos x="csX1" y="csY1"/>
               </a:cxn>
               <a:cxn ang="0">
-                <a:pos x="connsiteX2" y="connsiteY2"/>
+                <a:pos x="csX2" y="csY2"/>
               </a:cxn>
             </a:cxnLst>
             <a:rect l="l" t="t" r="r" b="b"/>
@@ -41154,37 +41154,37 @@
           <a:custGeom>
             <a:avLst/>
             <a:gdLst>
-              <a:gd name="connsiteX0" fmla="*/ 911111 w 2879678"/>
-              <a:gd name="connsiteY0" fmla="*/ 1532040 h 1587494"/>
-              <a:gd name="connsiteX1" fmla="*/ 2400 w 2879678"/>
-              <a:gd name="connsiteY1" fmla="*/ 839562 h 1587494"/>
-              <a:gd name="connsiteX2" fmla="*/ 848367 w 2879678"/>
-              <a:gd name="connsiteY2" fmla="*/ 70064 h 1587494"/>
-              <a:gd name="connsiteX3" fmla="*/ 1155932 w 2879678"/>
-              <a:gd name="connsiteY3" fmla="*/ 446379 h 1587494"/>
-              <a:gd name="connsiteX4" fmla="*/ 1439839 w 2879678"/>
-              <a:gd name="connsiteY4" fmla="*/ 793747 h 1587494"/>
-              <a:gd name="connsiteX5" fmla="*/ 1186050 w 2879678"/>
-              <a:gd name="connsiteY5" fmla="*/ 1148128 h 1587494"/>
-              <a:gd name="connsiteX6" fmla="*/ 911111 w 2879678"/>
-              <a:gd name="connsiteY6" fmla="*/ 1532040 h 1587494"/>
-              <a:gd name="connsiteX0" fmla="*/ 911111 w 2879678"/>
-              <a:gd name="connsiteY0" fmla="*/ 1532040 h 1587494"/>
-              <a:gd name="connsiteX1" fmla="*/ 2400 w 2879678"/>
-              <a:gd name="connsiteY1" fmla="*/ 839562 h 1587494"/>
-              <a:gd name="connsiteX2" fmla="*/ 848367 w 2879678"/>
-              <a:gd name="connsiteY2" fmla="*/ 70064 h 1587494"/>
+              <a:gd name="csX0" fmla="*/ 911111 w 2879678"/>
+              <a:gd name="csY0" fmla="*/ 1532040 h 1587494"/>
+              <a:gd name="csX1" fmla="*/ 2400 w 2879678"/>
+              <a:gd name="csY1" fmla="*/ 839562 h 1587494"/>
+              <a:gd name="csX2" fmla="*/ 848367 w 2879678"/>
+              <a:gd name="csY2" fmla="*/ 70064 h 1587494"/>
+              <a:gd name="csX3" fmla="*/ 1155932 w 2879678"/>
+              <a:gd name="csY3" fmla="*/ 446379 h 1587494"/>
+              <a:gd name="csX4" fmla="*/ 1439839 w 2879678"/>
+              <a:gd name="csY4" fmla="*/ 793747 h 1587494"/>
+              <a:gd name="csX5" fmla="*/ 1186050 w 2879678"/>
+              <a:gd name="csY5" fmla="*/ 1148128 h 1587494"/>
+              <a:gd name="csX6" fmla="*/ 911111 w 2879678"/>
+              <a:gd name="csY6" fmla="*/ 1532040 h 1587494"/>
+              <a:gd name="csX0" fmla="*/ 911111 w 2879678"/>
+              <a:gd name="csY0" fmla="*/ 1532040 h 1587494"/>
+              <a:gd name="csX1" fmla="*/ 2400 w 2879678"/>
+              <a:gd name="csY1" fmla="*/ 839562 h 1587494"/>
+              <a:gd name="csX2" fmla="*/ 848367 w 2879678"/>
+              <a:gd name="csY2" fmla="*/ 70064 h 1587494"/>
             </a:gdLst>
             <a:ahLst/>
             <a:cxnLst>
               <a:cxn ang="0">
-                <a:pos x="connsiteX0" y="connsiteY0"/>
+                <a:pos x="csX0" y="csY0"/>
               </a:cxn>
               <a:cxn ang="0">
-                <a:pos x="connsiteX1" y="connsiteY1"/>
+                <a:pos x="csX1" y="csY1"/>
               </a:cxn>
               <a:cxn ang="0">
-                <a:pos x="connsiteX2" y="connsiteY2"/>
+                <a:pos x="csX2" y="csY2"/>
               </a:cxn>
             </a:cxnLst>
             <a:rect l="l" t="t" r="r" b="b"/>
@@ -41322,41 +41322,41 @@
           <a:custGeom>
             <a:avLst/>
             <a:gdLst>
-              <a:gd name="connsiteX0" fmla="*/ 574214 w 4658437"/>
-              <a:gd name="connsiteY0" fmla="*/ 271876 h 1587494"/>
-              <a:gd name="connsiteX1" fmla="*/ 2335730 w 4658437"/>
-              <a:gd name="connsiteY1" fmla="*/ 3 h 1587494"/>
-              <a:gd name="connsiteX2" fmla="*/ 4129932 w 4658437"/>
-              <a:gd name="connsiteY2" fmla="*/ 290283 h 1587494"/>
-              <a:gd name="connsiteX3" fmla="*/ 3493680 w 4658437"/>
-              <a:gd name="connsiteY3" fmla="*/ 468174 h 1587494"/>
-              <a:gd name="connsiteX4" fmla="*/ 2893442 w 4658437"/>
-              <a:gd name="connsiteY4" fmla="*/ 635995 h 1587494"/>
-              <a:gd name="connsiteX5" fmla="*/ 2329219 w 4658437"/>
-              <a:gd name="connsiteY5" fmla="*/ 793747 h 1587494"/>
-              <a:gd name="connsiteX6" fmla="*/ 1779317 w 4658437"/>
-              <a:gd name="connsiteY6" fmla="*/ 630227 h 1587494"/>
-              <a:gd name="connsiteX7" fmla="*/ 1229416 w 4658437"/>
-              <a:gd name="connsiteY7" fmla="*/ 466708 h 1587494"/>
-              <a:gd name="connsiteX8" fmla="*/ 574214 w 4658437"/>
-              <a:gd name="connsiteY8" fmla="*/ 271876 h 1587494"/>
-              <a:gd name="connsiteX0" fmla="*/ 574214 w 4658437"/>
-              <a:gd name="connsiteY0" fmla="*/ 271876 h 1587494"/>
-              <a:gd name="connsiteX1" fmla="*/ 2335730 w 4658437"/>
-              <a:gd name="connsiteY1" fmla="*/ 3 h 1587494"/>
-              <a:gd name="connsiteX2" fmla="*/ 4129932 w 4658437"/>
-              <a:gd name="connsiteY2" fmla="*/ 290283 h 1587494"/>
+              <a:gd name="csX0" fmla="*/ 574214 w 4658437"/>
+              <a:gd name="csY0" fmla="*/ 271876 h 1587494"/>
+              <a:gd name="csX1" fmla="*/ 2335730 w 4658437"/>
+              <a:gd name="csY1" fmla="*/ 3 h 1587494"/>
+              <a:gd name="csX2" fmla="*/ 4129932 w 4658437"/>
+              <a:gd name="csY2" fmla="*/ 290283 h 1587494"/>
+              <a:gd name="csX3" fmla="*/ 3493680 w 4658437"/>
+              <a:gd name="csY3" fmla="*/ 468174 h 1587494"/>
+              <a:gd name="csX4" fmla="*/ 2893442 w 4658437"/>
+              <a:gd name="csY4" fmla="*/ 635995 h 1587494"/>
+              <a:gd name="csX5" fmla="*/ 2329219 w 4658437"/>
+              <a:gd name="csY5" fmla="*/ 793747 h 1587494"/>
+              <a:gd name="csX6" fmla="*/ 1779317 w 4658437"/>
+              <a:gd name="csY6" fmla="*/ 630227 h 1587494"/>
+              <a:gd name="csX7" fmla="*/ 1229416 w 4658437"/>
+              <a:gd name="csY7" fmla="*/ 466708 h 1587494"/>
+              <a:gd name="csX8" fmla="*/ 574214 w 4658437"/>
+              <a:gd name="csY8" fmla="*/ 271876 h 1587494"/>
+              <a:gd name="csX0" fmla="*/ 574214 w 4658437"/>
+              <a:gd name="csY0" fmla="*/ 271876 h 1587494"/>
+              <a:gd name="csX1" fmla="*/ 2335730 w 4658437"/>
+              <a:gd name="csY1" fmla="*/ 3 h 1587494"/>
+              <a:gd name="csX2" fmla="*/ 4129932 w 4658437"/>
+              <a:gd name="csY2" fmla="*/ 290283 h 1587494"/>
             </a:gdLst>
             <a:ahLst/>
             <a:cxnLst>
               <a:cxn ang="0">
-                <a:pos x="connsiteX0" y="connsiteY0"/>
+                <a:pos x="csX0" y="csY0"/>
               </a:cxn>
               <a:cxn ang="0">
-                <a:pos x="connsiteX1" y="connsiteY1"/>
+                <a:pos x="csX1" y="csY1"/>
               </a:cxn>
               <a:cxn ang="0">
-                <a:pos x="connsiteX2" y="connsiteY2"/>
+                <a:pos x="csX2" y="csY2"/>
               </a:cxn>
             </a:cxnLst>
             <a:rect l="l" t="t" r="r" b="b"/>

--- a/week06/Lecture06.pptx
+++ b/week06/Lecture06.pptx
@@ -539,7 +539,7 @@
           <a:p>
             <a:fld id="{634F3F22-B4BB-3F48-9180-464A9F2D66D1}" type="datetimeFigureOut">
               <a:rPr kumimoji="1" lang="zh-CN" altLang="en-US" smtClean="0"/>
-              <a:t>2026/4/6</a:t>
+              <a:t>2026/4/7</a:t>
             </a:fld>
             <a:endParaRPr kumimoji="1" lang="zh-CN" altLang="en-US"/>
           </a:p>
@@ -1019,7 +1019,7 @@
           <a:p>
             <a:fld id="{FC19A4FA-3D9A-4114-B0D5-759CBD56F1AB}" type="datetimeFigureOut">
               <a:rPr lang="zh-CN" altLang="en-US" smtClean="0"/>
-              <a:t>2026/4/6</a:t>
+              <a:t>2026/4/7</a:t>
             </a:fld>
             <a:endParaRPr lang="zh-CN" altLang="en-US"/>
           </a:p>
@@ -1222,7 +1222,7 @@
           <a:p>
             <a:fld id="{FC19A4FA-3D9A-4114-B0D5-759CBD56F1AB}" type="datetimeFigureOut">
               <a:rPr lang="zh-CN" altLang="en-US" smtClean="0"/>
-              <a:t>2026/4/6</a:t>
+              <a:t>2026/4/7</a:t>
             </a:fld>
             <a:endParaRPr lang="zh-CN" altLang="en-US"/>
           </a:p>
@@ -1400,7 +1400,7 @@
           <a:p>
             <a:fld id="{FC19A4FA-3D9A-4114-B0D5-759CBD56F1AB}" type="datetimeFigureOut">
               <a:rPr lang="zh-CN" altLang="en-US" smtClean="0"/>
-              <a:t>2026/4/6</a:t>
+              <a:t>2026/4/7</a:t>
             </a:fld>
             <a:endParaRPr lang="zh-CN" altLang="en-US"/>
           </a:p>
@@ -1624,7 +1624,7 @@
           <a:p>
             <a:fld id="{FC19A4FA-3D9A-4114-B0D5-759CBD56F1AB}" type="datetimeFigureOut">
               <a:rPr lang="zh-CN" altLang="en-US" smtClean="0"/>
-              <a:t>2026/4/6</a:t>
+              <a:t>2026/4/7</a:t>
             </a:fld>
             <a:endParaRPr lang="zh-CN" altLang="en-US"/>
           </a:p>
@@ -1858,7 +1858,7 @@
           <a:p>
             <a:fld id="{FC19A4FA-3D9A-4114-B0D5-759CBD56F1AB}" type="datetimeFigureOut">
               <a:rPr lang="zh-CN" altLang="en-US" smtClean="0"/>
-              <a:t>2026/4/6</a:t>
+              <a:t>2026/4/7</a:t>
             </a:fld>
             <a:endParaRPr lang="zh-CN" altLang="en-US"/>
           </a:p>
@@ -2257,7 +2257,7 @@
           <a:p>
             <a:fld id="{FC19A4FA-3D9A-4114-B0D5-759CBD56F1AB}" type="datetimeFigureOut">
               <a:rPr lang="zh-CN" altLang="en-US" smtClean="0"/>
-              <a:t>2026/4/6</a:t>
+              <a:t>2026/4/7</a:t>
             </a:fld>
             <a:endParaRPr lang="zh-CN" altLang="en-US"/>
           </a:p>
@@ -2537,7 +2537,7 @@
           <a:p>
             <a:fld id="{FC19A4FA-3D9A-4114-B0D5-759CBD56F1AB}" type="datetimeFigureOut">
               <a:rPr lang="zh-CN" altLang="en-US" smtClean="0"/>
-              <a:t>2026/4/6</a:t>
+              <a:t>2026/4/7</a:t>
             </a:fld>
             <a:endParaRPr lang="zh-CN" altLang="en-US"/>
           </a:p>
@@ -2689,7 +2689,7 @@
           <a:p>
             <a:fld id="{FC19A4FA-3D9A-4114-B0D5-759CBD56F1AB}" type="datetimeFigureOut">
               <a:rPr lang="zh-CN" altLang="en-US" smtClean="0"/>
-              <a:t>2026/4/6</a:t>
+              <a:t>2026/4/7</a:t>
             </a:fld>
             <a:endParaRPr lang="zh-CN" altLang="en-US"/>
           </a:p>
@@ -2819,7 +2819,7 @@
           <a:p>
             <a:fld id="{FC19A4FA-3D9A-4114-B0D5-759CBD56F1AB}" type="datetimeFigureOut">
               <a:rPr lang="zh-CN" altLang="en-US" smtClean="0"/>
-              <a:t>2026/4/6</a:t>
+              <a:t>2026/4/7</a:t>
             </a:fld>
             <a:endParaRPr lang="zh-CN" altLang="en-US"/>
           </a:p>
@@ -3129,7 +3129,7 @@
           <a:p>
             <a:fld id="{FC19A4FA-3D9A-4114-B0D5-759CBD56F1AB}" type="datetimeFigureOut">
               <a:rPr lang="zh-CN" altLang="en-US" smtClean="0"/>
-              <a:t>2026/4/6</a:t>
+              <a:t>2026/4/7</a:t>
             </a:fld>
             <a:endParaRPr lang="zh-CN" altLang="en-US"/>
           </a:p>
@@ -3416,7 +3416,7 @@
           <a:p>
             <a:fld id="{FC19A4FA-3D9A-4114-B0D5-759CBD56F1AB}" type="datetimeFigureOut">
               <a:rPr lang="zh-CN" altLang="en-US" smtClean="0"/>
-              <a:t>2026/4/6</a:t>
+              <a:t>2026/4/7</a:t>
             </a:fld>
             <a:endParaRPr lang="zh-CN" altLang="en-US"/>
           </a:p>
@@ -3709,7 +3709,7 @@
           <a:p>
             <a:fld id="{FC19A4FA-3D9A-4114-B0D5-759CBD56F1AB}" type="datetimeFigureOut">
               <a:rPr lang="zh-CN" altLang="en-US" smtClean="0"/>
-              <a:t>2026/4/6</a:t>
+              <a:t>2026/4/7</a:t>
             </a:fld>
             <a:endParaRPr lang="zh-CN" altLang="en-US"/>
           </a:p>
@@ -7135,7 +7135,7 @@
                 </a:solidFill>
                 <a:latin typeface="Menlo" panose="020B0609030804020204" pitchFamily="49" charset="0"/>
               </a:rPr>
-              <a:t>FLT_MIN</a:t>
+              <a:t>-FLT_MAX</a:t>
             </a:r>
             <a:r>
               <a:rPr lang="en" altLang="zh-CN" dirty="0">
@@ -14333,7 +14333,7 @@
                 </a:solidFill>
                 <a:latin typeface="Menlo" panose="020B0609030804020204" pitchFamily="49" charset="0"/>
               </a:rPr>
-              <a:t>FLT_MIN</a:t>
+              <a:t>-FLT_MAX</a:t>
             </a:r>
             <a:r>
               <a:rPr lang="en" altLang="zh-CN" sz="1400" dirty="0">
@@ -27174,10 +27174,10 @@
       </p:grpSpPr>
       <p:pic>
         <p:nvPicPr>
-          <p:cNvPr id="10" name="图片 9">
+          <p:cNvPr id="4" name="图片 3">
             <a:extLst>
               <a:ext uri="{FF2B5EF4-FFF2-40B4-BE49-F238E27FC236}">
-                <a16:creationId xmlns:a16="http://schemas.microsoft.com/office/drawing/2014/main" id="{7F164FED-9CF1-5770-FA1D-E6147C1B283F}"/>
+                <a16:creationId xmlns:a16="http://schemas.microsoft.com/office/drawing/2014/main" id="{468EF0FA-532F-FD0A-9BF7-33F8220DCE90}"/>
               </a:ext>
             </a:extLst>
           </p:cNvPr>
@@ -27194,8 +27194,8 @@
         </p:blipFill>
         <p:spPr>
           <a:xfrm>
-            <a:off x="6452451" y="2062925"/>
-            <a:ext cx="5439628" cy="4795076"/>
+            <a:off x="6224587" y="2069183"/>
+            <a:ext cx="4979487" cy="4385848"/>
           </a:xfrm>
           <a:prstGeom prst="rect">
             <a:avLst/>
@@ -27292,7 +27292,7 @@
         </p:nvGrpSpPr>
         <p:grpSpPr>
           <a:xfrm>
-            <a:off x="9791393" y="2694448"/>
+            <a:off x="9791393" y="2469480"/>
             <a:ext cx="1006920" cy="1128240"/>
             <a:chOff x="9889365" y="2855662"/>
             <a:chExt cx="1006920" cy="1128240"/>
@@ -27403,10 +27403,10 @@
       </p:grpSp>
       <p:pic>
         <p:nvPicPr>
-          <p:cNvPr id="9" name="图片 8">
+          <p:cNvPr id="5" name="图片 4">
             <a:extLst>
               <a:ext uri="{FF2B5EF4-FFF2-40B4-BE49-F238E27FC236}">
-                <a16:creationId xmlns:a16="http://schemas.microsoft.com/office/drawing/2014/main" id="{0E42D341-4A27-BA36-4F3A-8BB80016C436}"/>
+                <a16:creationId xmlns:a16="http://schemas.microsoft.com/office/drawing/2014/main" id="{AFBBB856-6D13-5438-50A0-A914A6B4552F}"/>
               </a:ext>
             </a:extLst>
           </p:cNvPr>
@@ -27423,12 +27423,13 @@
         </p:blipFill>
         <p:spPr>
           <a:xfrm>
-            <a:off x="571668" y="2069184"/>
-            <a:ext cx="5439628" cy="4788815"/>
+            <a:off x="842761" y="2069183"/>
+            <a:ext cx="4979487" cy="4352637"/>
           </a:xfrm>
           <a:prstGeom prst="rect">
             <a:avLst/>
           </a:prstGeom>
+          <a:noFill/>
           <a:ln>
             <a:solidFill>
               <a:schemeClr val="accent6"/>
@@ -27738,7 +27739,7 @@
                 </a:solidFill>
                 <a:latin typeface="Menlo" panose="020B0609030804020204" pitchFamily="49" charset="0"/>
               </a:rPr>
-              <a:t>FLT_MIN</a:t>
+              <a:t>-FLT_MAX</a:t>
             </a:r>
             <a:r>
               <a:rPr lang="en" altLang="zh-CN" dirty="0">
@@ -35700,7 +35701,7 @@
                 </a:solidFill>
                 <a:latin typeface="Menlo" panose="020B0609030804020204" pitchFamily="49" charset="0"/>
               </a:rPr>
-              <a:t>FLT_MIN</a:t>
+              <a:t>-FLT_MAX</a:t>
             </a:r>
             <a:r>
               <a:rPr lang="en" altLang="zh-CN" dirty="0">
@@ -36981,7 +36982,7 @@
                 </a:solidFill>
                 <a:latin typeface="Menlo" panose="020B0609030804020204" pitchFamily="49" charset="0"/>
               </a:rPr>
-              <a:t>FLT_MIN</a:t>
+              <a:t>-FLT_MAX</a:t>
             </a:r>
             <a:r>
               <a:rPr lang="en" altLang="zh-CN" dirty="0">
